--- a/assets/exports/templates/calls.pptx
+++ b/assets/exports/templates/calls.pptx
@@ -1104,7 +1104,7 @@
           <a:lstStyle/>
           <a:p>
             <a:r>
-              <a:t>{{question}}. {{business}}. §intro§ lorem§intro§ lorem§intro§ lorem§intro§ lorem§intro§ lorem§intro§ lorem§intro§ lorem§intro§ lorem§intro§ lorem§intro§ lorem§intro§ lorem§intro§ lorem§intro§ lorem§intro§ lorem§intro§ lorem§intro§ lorem§intro§ lorem§intro§ lorem§intro§ lorem§intro§ lorem§intro§ lorem§intro§ lorem§intro§ lorem§intro§ lorem§intro§ lorem</a:t>
+              <a:t>{{question}}. {{business}}. Period: {{period_label}}. In short: {{answer}} {{intro}}</a:t>
             </a:r>
           </a:p>
         </p:txBody>
@@ -6133,7 +6133,7 @@
         </p:nvGraphicFramePr>
         <p:xfrm>
           <a:off x="457200" y="1507236"/>
-          <a:ext cx="11277295" cy="2035302.0"/>
+          <a:ext cx="11277295" cy="2035302"/>
         </p:xfrm>
         <a:graphic>
           <a:graphicData uri="http://schemas.openxmlformats.org/drawingml/2006/chart">
@@ -6189,8 +6189,8 @@
           <p:nvPr/>
         </p:nvGraphicFramePr>
         <p:xfrm>
-          <a:off x="457200" y="3862578.0"/>
-          <a:ext cx="11277295" cy="2035302.0"/>
+          <a:off x="457200" y="3862578"/>
+          <a:ext cx="11277295" cy="2035302"/>
         </p:xfrm>
         <a:graphic>
           <a:graphicData uri="http://schemas.openxmlformats.org/drawingml/2006/chart">
